--- a/modules/buguan/buguan_ziyong/static/tab栏/画图.pptx
+++ b/modules/buguan/buguan_ziyong/static/tab栏/画图.pptx
@@ -104,6 +104,11 @@
       </a:defRPr>
     </a:lvl9pPr>
   </p:defaultTextStyle>
+  <p:extLst>
+    <p:ext uri="{EFAFB233-063F-42B5-8137-9DF3F51BA10A}">
+      <p15:sldGuideLst xmlns:p15="http://schemas.microsoft.com/office/powerpoint/2012/main"/>
+    </p:ext>
+  </p:extLst>
 </p:presentation>
 </file>
 
@@ -3321,574 +3326,850 @@
           <a:chExt cx="0" cy="0"/>
         </a:xfrm>
       </p:grpSpPr>
-      <p:pic>
-        <p:nvPicPr>
-          <p:cNvPr id="5" name="图片 4">
-            <a:extLst>
-              <a:ext uri="{FF2B5EF4-FFF2-40B4-BE49-F238E27FC236}">
-                <a16:creationId xmlns:a16="http://schemas.microsoft.com/office/drawing/2014/main" id="{7267EB4B-A3AD-75B3-DD63-02E6310EC500}"/>
-              </a:ext>
-            </a:extLst>
-          </p:cNvPr>
-          <p:cNvPicPr>
-            <a:picLocks noChangeAspect="1"/>
-          </p:cNvPicPr>
+      <p:grpSp>
+        <p:nvGrpSpPr>
+          <p:cNvPr id="2" name="组合 1">
+            <a:extLst>
+              <a:ext uri="{FF2B5EF4-FFF2-40B4-BE49-F238E27FC236}">
+                <a16:creationId xmlns:a16="http://schemas.microsoft.com/office/drawing/2014/main" id="{84620D55-6BEC-3D90-186C-579D5D26EA9E}"/>
+              </a:ext>
+            </a:extLst>
+          </p:cNvPr>
+          <p:cNvGrpSpPr/>
           <p:nvPr/>
-        </p:nvPicPr>
-        <p:blipFill>
-          <a:blip r:embed="rId2">
-            <a:extLst>
-              <a:ext uri="{28A0092B-C50C-407E-A947-70E740481C1C}">
-                <a14:useLocalDpi xmlns:a14="http://schemas.microsoft.com/office/drawing/2010/main" val="0"/>
-              </a:ext>
-            </a:extLst>
-          </a:blip>
-          <a:stretch>
-            <a:fillRect/>
-          </a:stretch>
-        </p:blipFill>
-        <p:spPr>
+        </p:nvGrpSpPr>
+        <p:grpSpPr>
           <a:xfrm>
-            <a:off x="695378" y="2657571"/>
-            <a:ext cx="361843" cy="325659"/>
+            <a:off x="130494" y="2650747"/>
+            <a:ext cx="1311851" cy="369332"/>
+            <a:chOff x="695378" y="2643925"/>
+            <a:chExt cx="1311851" cy="369332"/>
           </a:xfrm>
-          <a:prstGeom prst="rect">
-            <a:avLst/>
-          </a:prstGeom>
-        </p:spPr>
-      </p:pic>
-      <p:sp>
-        <p:nvSpPr>
-          <p:cNvPr id="7" name="文本框 6">
-            <a:extLst>
-              <a:ext uri="{FF2B5EF4-FFF2-40B4-BE49-F238E27FC236}">
-                <a16:creationId xmlns:a16="http://schemas.microsoft.com/office/drawing/2014/main" id="{1C82A80F-5E78-FBD9-B7FC-7FA189ED5913}"/>
-              </a:ext>
-            </a:extLst>
-          </p:cNvPr>
-          <p:cNvSpPr txBox="1"/>
+        </p:grpSpPr>
+        <p:pic>
+          <p:nvPicPr>
+            <p:cNvPr id="5" name="图片 4">
+              <a:extLst>
+                <a:ext uri="{FF2B5EF4-FFF2-40B4-BE49-F238E27FC236}">
+                  <a16:creationId xmlns:a16="http://schemas.microsoft.com/office/drawing/2014/main" id="{7267EB4B-A3AD-75B3-DD63-02E6310EC500}"/>
+                </a:ext>
+              </a:extLst>
+            </p:cNvPr>
+            <p:cNvPicPr>
+              <a:picLocks noChangeAspect="1"/>
+            </p:cNvPicPr>
+            <p:nvPr/>
+          </p:nvPicPr>
+          <p:blipFill>
+            <a:blip r:embed="rId2">
+              <a:extLst>
+                <a:ext uri="{28A0092B-C50C-407E-A947-70E740481C1C}">
+                  <a14:useLocalDpi xmlns:a14="http://schemas.microsoft.com/office/drawing/2010/main" val="0"/>
+                </a:ext>
+              </a:extLst>
+            </a:blip>
+            <a:stretch>
+              <a:fillRect/>
+            </a:stretch>
+          </p:blipFill>
+          <p:spPr>
+            <a:xfrm>
+              <a:off x="695378" y="2657571"/>
+              <a:ext cx="361843" cy="325659"/>
+            </a:xfrm>
+            <a:prstGeom prst="rect">
+              <a:avLst/>
+            </a:prstGeom>
+          </p:spPr>
+        </p:pic>
+        <p:sp>
+          <p:nvSpPr>
+            <p:cNvPr id="7" name="文本框 6">
+              <a:extLst>
+                <a:ext uri="{FF2B5EF4-FFF2-40B4-BE49-F238E27FC236}">
+                  <a16:creationId xmlns:a16="http://schemas.microsoft.com/office/drawing/2014/main" id="{1C82A80F-5E78-FBD9-B7FC-7FA189ED5913}"/>
+                </a:ext>
+              </a:extLst>
+            </p:cNvPr>
+            <p:cNvSpPr txBox="1"/>
+            <p:nvPr/>
+          </p:nvSpPr>
+          <p:spPr>
+            <a:xfrm>
+              <a:off x="967099" y="2643925"/>
+              <a:ext cx="1040130" cy="369332"/>
+            </a:xfrm>
+            <a:prstGeom prst="rect">
+              <a:avLst/>
+            </a:prstGeom>
+            <a:noFill/>
+          </p:spPr>
+          <p:txBody>
+            <a:bodyPr wrap="square" rtlCol="0">
+              <a:spAutoFit/>
+            </a:bodyPr>
+            <a:lstStyle/>
+            <a:p>
+              <a:r>
+                <a:rPr lang="zh-CN" altLang="en-US" b="1"/>
+                <a:t>换热管</a:t>
+              </a:r>
+            </a:p>
+          </p:txBody>
+        </p:sp>
+      </p:grpSp>
+      <p:grpSp>
+        <p:nvGrpSpPr>
+          <p:cNvPr id="3" name="组合 2">
+            <a:extLst>
+              <a:ext uri="{FF2B5EF4-FFF2-40B4-BE49-F238E27FC236}">
+                <a16:creationId xmlns:a16="http://schemas.microsoft.com/office/drawing/2014/main" id="{1AB14EAB-1316-6BD3-3DFC-628707565B71}"/>
+              </a:ext>
+            </a:extLst>
+          </p:cNvPr>
+          <p:cNvGrpSpPr/>
           <p:nvPr/>
-        </p:nvSpPr>
-        <p:spPr>
+        </p:nvGrpSpPr>
+        <p:grpSpPr>
           <a:xfrm>
-            <a:off x="967099" y="2643925"/>
-            <a:ext cx="1040130" cy="369332"/>
+            <a:off x="1250284" y="2635734"/>
+            <a:ext cx="1361176" cy="381321"/>
+            <a:chOff x="1826308" y="2635734"/>
+            <a:chExt cx="1361176" cy="381321"/>
           </a:xfrm>
-          <a:prstGeom prst="rect">
-            <a:avLst/>
-          </a:prstGeom>
-          <a:noFill/>
-        </p:spPr>
-        <p:txBody>
-          <a:bodyPr wrap="square" rtlCol="0">
-            <a:spAutoFit/>
-          </a:bodyPr>
-          <a:lstStyle/>
-          <a:p>
-            <a:r>
-              <a:rPr lang="zh-CN" altLang="en-US" b="1"/>
-              <a:t>换热管</a:t>
-            </a:r>
-          </a:p>
-        </p:txBody>
-      </p:sp>
-      <p:pic>
-        <p:nvPicPr>
-          <p:cNvPr id="9" name="图片 8">
-            <a:extLst>
-              <a:ext uri="{FF2B5EF4-FFF2-40B4-BE49-F238E27FC236}">
-                <a16:creationId xmlns:a16="http://schemas.microsoft.com/office/drawing/2014/main" id="{880038C1-7BB0-8E79-7E8B-7CECAD7D916B}"/>
-              </a:ext>
-            </a:extLst>
-          </p:cNvPr>
-          <p:cNvPicPr>
-            <a:picLocks noChangeAspect="1"/>
-          </p:cNvPicPr>
+        </p:grpSpPr>
+        <p:pic>
+          <p:nvPicPr>
+            <p:cNvPr id="9" name="图片 8">
+              <a:extLst>
+                <a:ext uri="{FF2B5EF4-FFF2-40B4-BE49-F238E27FC236}">
+                  <a16:creationId xmlns:a16="http://schemas.microsoft.com/office/drawing/2014/main" id="{880038C1-7BB0-8E79-7E8B-7CECAD7D916B}"/>
+                </a:ext>
+              </a:extLst>
+            </p:cNvPr>
+            <p:cNvPicPr>
+              <a:picLocks noChangeAspect="1"/>
+            </p:cNvPicPr>
+            <p:nvPr/>
+          </p:nvPicPr>
+          <p:blipFill>
+            <a:blip r:embed="rId3">
+              <a:extLst>
+                <a:ext uri="{28A0092B-C50C-407E-A947-70E740481C1C}">
+                  <a14:useLocalDpi xmlns:a14="http://schemas.microsoft.com/office/drawing/2010/main" val="0"/>
+                </a:ext>
+              </a:extLst>
+            </a:blip>
+            <a:stretch>
+              <a:fillRect/>
+            </a:stretch>
+          </p:blipFill>
+          <p:spPr>
+            <a:xfrm>
+              <a:off x="1826308" y="2635734"/>
+              <a:ext cx="361843" cy="349781"/>
+            </a:xfrm>
+            <a:prstGeom prst="rect">
+              <a:avLst/>
+            </a:prstGeom>
+          </p:spPr>
+        </p:pic>
+        <p:sp>
+          <p:nvSpPr>
+            <p:cNvPr id="10" name="文本框 9">
+              <a:extLst>
+                <a:ext uri="{FF2B5EF4-FFF2-40B4-BE49-F238E27FC236}">
+                  <a16:creationId xmlns:a16="http://schemas.microsoft.com/office/drawing/2014/main" id="{34FDAF14-0BF3-EABA-7458-0C5A4A11C89D}"/>
+                </a:ext>
+              </a:extLst>
+            </p:cNvPr>
+            <p:cNvSpPr txBox="1"/>
+            <p:nvPr/>
+          </p:nvSpPr>
+          <p:spPr>
+            <a:xfrm>
+              <a:off x="2147354" y="2647723"/>
+              <a:ext cx="1040130" cy="369332"/>
+            </a:xfrm>
+            <a:prstGeom prst="rect">
+              <a:avLst/>
+            </a:prstGeom>
+            <a:noFill/>
+          </p:spPr>
+          <p:txBody>
+            <a:bodyPr wrap="square" rtlCol="0">
+              <a:spAutoFit/>
+            </a:bodyPr>
+            <a:lstStyle/>
+            <a:p>
+              <a:r>
+                <a:rPr lang="zh-CN" altLang="en-US" b="1"/>
+                <a:t>拉杆</a:t>
+              </a:r>
+            </a:p>
+          </p:txBody>
+        </p:sp>
+      </p:grpSp>
+      <p:grpSp>
+        <p:nvGrpSpPr>
+          <p:cNvPr id="4" name="组合 3">
+            <a:extLst>
+              <a:ext uri="{FF2B5EF4-FFF2-40B4-BE49-F238E27FC236}">
+                <a16:creationId xmlns:a16="http://schemas.microsoft.com/office/drawing/2014/main" id="{59A82B99-7349-B937-883A-D52B853EE2D3}"/>
+              </a:ext>
+            </a:extLst>
+          </p:cNvPr>
+          <p:cNvGrpSpPr/>
           <p:nvPr/>
-        </p:nvPicPr>
-        <p:blipFill>
-          <a:blip r:embed="rId3">
-            <a:extLst>
-              <a:ext uri="{28A0092B-C50C-407E-A947-70E740481C1C}">
-                <a14:useLocalDpi xmlns:a14="http://schemas.microsoft.com/office/drawing/2010/main" val="0"/>
-              </a:ext>
-            </a:extLst>
-          </a:blip>
-          <a:stretch>
-            <a:fillRect/>
-          </a:stretch>
-        </p:blipFill>
-        <p:spPr>
+        </p:nvGrpSpPr>
+        <p:grpSpPr>
           <a:xfrm>
-            <a:off x="1826308" y="2635734"/>
-            <a:ext cx="361843" cy="349781"/>
+            <a:off x="2181863" y="2636660"/>
+            <a:ext cx="1449632" cy="369332"/>
+            <a:chOff x="2817568" y="2643925"/>
+            <a:chExt cx="1449632" cy="369332"/>
           </a:xfrm>
-          <a:prstGeom prst="rect">
-            <a:avLst/>
-          </a:prstGeom>
-        </p:spPr>
-      </p:pic>
-      <p:sp>
-        <p:nvSpPr>
-          <p:cNvPr id="10" name="文本框 9">
-            <a:extLst>
-              <a:ext uri="{FF2B5EF4-FFF2-40B4-BE49-F238E27FC236}">
-                <a16:creationId xmlns:a16="http://schemas.microsoft.com/office/drawing/2014/main" id="{34FDAF14-0BF3-EABA-7458-0C5A4A11C89D}"/>
-              </a:ext>
-            </a:extLst>
-          </p:cNvPr>
-          <p:cNvSpPr txBox="1"/>
+        </p:grpSpPr>
+        <p:pic>
+          <p:nvPicPr>
+            <p:cNvPr id="12" name="图片 11">
+              <a:extLst>
+                <a:ext uri="{FF2B5EF4-FFF2-40B4-BE49-F238E27FC236}">
+                  <a16:creationId xmlns:a16="http://schemas.microsoft.com/office/drawing/2014/main" id="{E20C7735-7F14-FE0F-7D81-B531FAAF3551}"/>
+                </a:ext>
+              </a:extLst>
+            </p:cNvPr>
+            <p:cNvPicPr>
+              <a:picLocks noChangeAspect="1"/>
+            </p:cNvPicPr>
+            <p:nvPr/>
+          </p:nvPicPr>
+          <p:blipFill>
+            <a:blip r:embed="rId4">
+              <a:extLst>
+                <a:ext uri="{28A0092B-C50C-407E-A947-70E740481C1C}">
+                  <a14:useLocalDpi xmlns:a14="http://schemas.microsoft.com/office/drawing/2010/main" val="0"/>
+                </a:ext>
+              </a:extLst>
+            </a:blip>
+            <a:stretch>
+              <a:fillRect/>
+            </a:stretch>
+          </p:blipFill>
+          <p:spPr>
+            <a:xfrm>
+              <a:off x="2817568" y="2657571"/>
+              <a:ext cx="368859" cy="355686"/>
+            </a:xfrm>
+            <a:prstGeom prst="rect">
+              <a:avLst/>
+            </a:prstGeom>
+          </p:spPr>
+        </p:pic>
+        <p:sp>
+          <p:nvSpPr>
+            <p:cNvPr id="14" name="文本框 13">
+              <a:extLst>
+                <a:ext uri="{FF2B5EF4-FFF2-40B4-BE49-F238E27FC236}">
+                  <a16:creationId xmlns:a16="http://schemas.microsoft.com/office/drawing/2014/main" id="{EDC7BEB2-CD06-85FF-A11F-CB3EDDE937E2}"/>
+                </a:ext>
+              </a:extLst>
+            </p:cNvPr>
+            <p:cNvSpPr txBox="1"/>
+            <p:nvPr/>
+          </p:nvSpPr>
+          <p:spPr>
+            <a:xfrm>
+              <a:off x="3146686" y="2643925"/>
+              <a:ext cx="1120514" cy="369332"/>
+            </a:xfrm>
+            <a:prstGeom prst="rect">
+              <a:avLst/>
+            </a:prstGeom>
+            <a:noFill/>
+          </p:spPr>
+          <p:txBody>
+            <a:bodyPr wrap="square" rtlCol="0">
+              <a:spAutoFit/>
+            </a:bodyPr>
+            <a:lstStyle/>
+            <a:p>
+              <a:r>
+                <a:rPr lang="zh-CN" altLang="en-US" b="1"/>
+                <a:t>中间挡管</a:t>
+              </a:r>
+            </a:p>
+          </p:txBody>
+        </p:sp>
+      </p:grpSp>
+      <p:grpSp>
+        <p:nvGrpSpPr>
+          <p:cNvPr id="6" name="组合 5">
+            <a:extLst>
+              <a:ext uri="{FF2B5EF4-FFF2-40B4-BE49-F238E27FC236}">
+                <a16:creationId xmlns:a16="http://schemas.microsoft.com/office/drawing/2014/main" id="{A8E2C7A8-1409-FF28-DA12-B2A4EF4D3DEC}"/>
+              </a:ext>
+            </a:extLst>
+          </p:cNvPr>
+          <p:cNvGrpSpPr/>
           <p:nvPr/>
-        </p:nvSpPr>
-        <p:spPr>
+        </p:nvGrpSpPr>
+        <p:grpSpPr>
           <a:xfrm>
-            <a:off x="2147354" y="2647723"/>
-            <a:ext cx="1040130" cy="369332"/>
+            <a:off x="3547140" y="2610888"/>
+            <a:ext cx="1409891" cy="419021"/>
+            <a:chOff x="4301099" y="2625903"/>
+            <a:chExt cx="1409891" cy="419021"/>
           </a:xfrm>
-          <a:prstGeom prst="rect">
-            <a:avLst/>
-          </a:prstGeom>
-          <a:noFill/>
-        </p:spPr>
-        <p:txBody>
-          <a:bodyPr wrap="square" rtlCol="0">
-            <a:spAutoFit/>
-          </a:bodyPr>
-          <a:lstStyle/>
-          <a:p>
-            <a:r>
-              <a:rPr lang="zh-CN" altLang="en-US" b="1"/>
-              <a:t>拉杆</a:t>
-            </a:r>
-          </a:p>
-        </p:txBody>
-      </p:sp>
-      <p:pic>
-        <p:nvPicPr>
-          <p:cNvPr id="12" name="图片 11">
-            <a:extLst>
-              <a:ext uri="{FF2B5EF4-FFF2-40B4-BE49-F238E27FC236}">
-                <a16:creationId xmlns:a16="http://schemas.microsoft.com/office/drawing/2014/main" id="{E20C7735-7F14-FE0F-7D81-B531FAAF3551}"/>
-              </a:ext>
-            </a:extLst>
-          </p:cNvPr>
-          <p:cNvPicPr>
-            <a:picLocks noChangeAspect="1"/>
-          </p:cNvPicPr>
+        </p:grpSpPr>
+        <p:sp>
+          <p:nvSpPr>
+            <p:cNvPr id="15" name="文本框 14">
+              <a:extLst>
+                <a:ext uri="{FF2B5EF4-FFF2-40B4-BE49-F238E27FC236}">
+                  <a16:creationId xmlns:a16="http://schemas.microsoft.com/office/drawing/2014/main" id="{30925E13-FC43-3BC2-C40C-38A960068CC0}"/>
+                </a:ext>
+              </a:extLst>
+            </p:cNvPr>
+            <p:cNvSpPr txBox="1"/>
+            <p:nvPr/>
+          </p:nvSpPr>
+          <p:spPr>
+            <a:xfrm>
+              <a:off x="4596318" y="2643925"/>
+              <a:ext cx="1114672" cy="369332"/>
+            </a:xfrm>
+            <a:prstGeom prst="rect">
+              <a:avLst/>
+            </a:prstGeom>
+            <a:noFill/>
+          </p:spPr>
+          <p:txBody>
+            <a:bodyPr wrap="square" rtlCol="0">
+              <a:spAutoFit/>
+            </a:bodyPr>
+            <a:lstStyle/>
+            <a:p>
+              <a:r>
+                <a:rPr lang="zh-CN" altLang="en-US" b="1"/>
+                <a:t>中间挡板</a:t>
+              </a:r>
+            </a:p>
+          </p:txBody>
+        </p:sp>
+        <p:pic>
+          <p:nvPicPr>
+            <p:cNvPr id="20" name="图片 19">
+              <a:extLst>
+                <a:ext uri="{FF2B5EF4-FFF2-40B4-BE49-F238E27FC236}">
+                  <a16:creationId xmlns:a16="http://schemas.microsoft.com/office/drawing/2014/main" id="{08579511-3DEF-10D5-C064-19F61D3FD78D}"/>
+                </a:ext>
+              </a:extLst>
+            </p:cNvPr>
+            <p:cNvPicPr>
+              <a:picLocks noChangeAspect="1"/>
+            </p:cNvPicPr>
+            <p:nvPr/>
+          </p:nvPicPr>
+          <p:blipFill>
+            <a:blip r:embed="rId5">
+              <a:extLst>
+                <a:ext uri="{28A0092B-C50C-407E-A947-70E740481C1C}">
+                  <a14:useLocalDpi xmlns:a14="http://schemas.microsoft.com/office/drawing/2010/main" val="0"/>
+                </a:ext>
+              </a:extLst>
+            </a:blip>
+            <a:stretch>
+              <a:fillRect/>
+            </a:stretch>
+          </p:blipFill>
+          <p:spPr>
+            <a:xfrm>
+              <a:off x="4301099" y="2625903"/>
+              <a:ext cx="295219" cy="419021"/>
+            </a:xfrm>
+            <a:prstGeom prst="rect">
+              <a:avLst/>
+            </a:prstGeom>
+          </p:spPr>
+        </p:pic>
+      </p:grpSp>
+      <p:grpSp>
+        <p:nvGrpSpPr>
+          <p:cNvPr id="18" name="组合 17">
+            <a:extLst>
+              <a:ext uri="{FF2B5EF4-FFF2-40B4-BE49-F238E27FC236}">
+                <a16:creationId xmlns:a16="http://schemas.microsoft.com/office/drawing/2014/main" id="{BBBFBB86-4E5A-DAAA-FA95-02067183F14F}"/>
+              </a:ext>
+            </a:extLst>
+          </p:cNvPr>
+          <p:cNvGrpSpPr/>
           <p:nvPr/>
-        </p:nvPicPr>
-        <p:blipFill>
-          <a:blip r:embed="rId4">
-            <a:extLst>
-              <a:ext uri="{28A0092B-C50C-407E-A947-70E740481C1C}">
-                <a14:useLocalDpi xmlns:a14="http://schemas.microsoft.com/office/drawing/2010/main" val="0"/>
-              </a:ext>
-            </a:extLst>
-          </a:blip>
-          <a:stretch>
-            <a:fillRect/>
-          </a:stretch>
-        </p:blipFill>
-        <p:spPr>
+        </p:nvGrpSpPr>
+        <p:grpSpPr>
           <a:xfrm>
-            <a:off x="2817568" y="2657571"/>
-            <a:ext cx="368859" cy="355686"/>
+            <a:off x="4899526" y="2635732"/>
+            <a:ext cx="1486068" cy="369332"/>
+            <a:chOff x="2486360" y="3945010"/>
+            <a:chExt cx="1486068" cy="369332"/>
           </a:xfrm>
-          <a:prstGeom prst="rect">
-            <a:avLst/>
-          </a:prstGeom>
-        </p:spPr>
-      </p:pic>
-      <p:sp>
-        <p:nvSpPr>
-          <p:cNvPr id="13" name="文本框 12">
-            <a:extLst>
-              <a:ext uri="{FF2B5EF4-FFF2-40B4-BE49-F238E27FC236}">
-                <a16:creationId xmlns:a16="http://schemas.microsoft.com/office/drawing/2014/main" id="{C35945DE-E152-D036-8D19-D1B964B402D2}"/>
-              </a:ext>
-            </a:extLst>
-          </p:cNvPr>
-          <p:cNvSpPr txBox="1"/>
+        </p:grpSpPr>
+        <p:pic>
+          <p:nvPicPr>
+            <p:cNvPr id="22" name="图片 21">
+              <a:extLst>
+                <a:ext uri="{FF2B5EF4-FFF2-40B4-BE49-F238E27FC236}">
+                  <a16:creationId xmlns:a16="http://schemas.microsoft.com/office/drawing/2014/main" id="{41E67AF1-3683-76F5-6290-0BF12D4B2437}"/>
+                </a:ext>
+              </a:extLst>
+            </p:cNvPr>
+            <p:cNvPicPr>
+              <a:picLocks noChangeAspect="1"/>
+            </p:cNvPicPr>
+            <p:nvPr/>
+          </p:nvPicPr>
+          <p:blipFill>
+            <a:blip r:embed="rId6">
+              <a:extLst>
+                <a:ext uri="{28A0092B-C50C-407E-A947-70E740481C1C}">
+                  <a14:useLocalDpi xmlns:a14="http://schemas.microsoft.com/office/drawing/2010/main" val="0"/>
+                </a:ext>
+              </a:extLst>
+            </a:blip>
+            <a:stretch>
+              <a:fillRect/>
+            </a:stretch>
+          </p:blipFill>
+          <p:spPr>
+            <a:xfrm>
+              <a:off x="2486360" y="4020574"/>
+              <a:ext cx="362118" cy="247602"/>
+            </a:xfrm>
+            <a:prstGeom prst="rect">
+              <a:avLst/>
+            </a:prstGeom>
+          </p:spPr>
+        </p:pic>
+        <p:sp>
+          <p:nvSpPr>
+            <p:cNvPr id="24" name="文本框 23">
+              <a:extLst>
+                <a:ext uri="{FF2B5EF4-FFF2-40B4-BE49-F238E27FC236}">
+                  <a16:creationId xmlns:a16="http://schemas.microsoft.com/office/drawing/2014/main" id="{75398242-B606-4DD1-E18D-96582746A1CE}"/>
+                </a:ext>
+              </a:extLst>
+            </p:cNvPr>
+            <p:cNvSpPr txBox="1"/>
+            <p:nvPr/>
+          </p:nvSpPr>
+          <p:spPr>
+            <a:xfrm>
+              <a:off x="2851914" y="3945010"/>
+              <a:ext cx="1120514" cy="369332"/>
+            </a:xfrm>
+            <a:prstGeom prst="rect">
+              <a:avLst/>
+            </a:prstGeom>
+            <a:noFill/>
+          </p:spPr>
+          <p:txBody>
+            <a:bodyPr wrap="square" rtlCol="0">
+              <a:spAutoFit/>
+            </a:bodyPr>
+            <a:lstStyle/>
+            <a:p>
+              <a:r>
+                <a:rPr lang="zh-CN" altLang="en-US" b="1"/>
+                <a:t>旁路挡板</a:t>
+              </a:r>
+            </a:p>
+          </p:txBody>
+        </p:sp>
+      </p:grpSp>
+      <p:grpSp>
+        <p:nvGrpSpPr>
+          <p:cNvPr id="8" name="组合 7">
+            <a:extLst>
+              <a:ext uri="{FF2B5EF4-FFF2-40B4-BE49-F238E27FC236}">
+                <a16:creationId xmlns:a16="http://schemas.microsoft.com/office/drawing/2014/main" id="{030643F5-D1D6-9B12-A39C-241B0CBDA23B}"/>
+              </a:ext>
+            </a:extLst>
+          </p:cNvPr>
+          <p:cNvGrpSpPr/>
           <p:nvPr/>
-        </p:nvSpPr>
-        <p:spPr>
+        </p:nvGrpSpPr>
+        <p:grpSpPr>
           <a:xfrm>
-            <a:off x="10465229" y="2635734"/>
-            <a:ext cx="1040130" cy="369332"/>
+            <a:off x="6318811" y="2635732"/>
+            <a:ext cx="1872832" cy="369332"/>
+            <a:chOff x="6709266" y="2650747"/>
+            <a:chExt cx="1872832" cy="369332"/>
           </a:xfrm>
-          <a:prstGeom prst="rect">
-            <a:avLst/>
-          </a:prstGeom>
-          <a:noFill/>
-        </p:spPr>
-        <p:txBody>
-          <a:bodyPr wrap="square" rtlCol="0">
-            <a:spAutoFit/>
-          </a:bodyPr>
-          <a:lstStyle/>
-          <a:p>
-            <a:r>
-              <a:rPr lang="zh-CN" altLang="en-US" b="1"/>
-              <a:t>防冲板</a:t>
-            </a:r>
-          </a:p>
-        </p:txBody>
-      </p:sp>
-      <p:sp>
-        <p:nvSpPr>
-          <p:cNvPr id="14" name="文本框 13">
-            <a:extLst>
-              <a:ext uri="{FF2B5EF4-FFF2-40B4-BE49-F238E27FC236}">
-                <a16:creationId xmlns:a16="http://schemas.microsoft.com/office/drawing/2014/main" id="{EDC7BEB2-CD06-85FF-A11F-CB3EDDE937E2}"/>
-              </a:ext>
-            </a:extLst>
-          </p:cNvPr>
-          <p:cNvSpPr txBox="1"/>
+        </p:grpSpPr>
+        <p:sp>
+          <p:nvSpPr>
+            <p:cNvPr id="16" name="文本框 15">
+              <a:extLst>
+                <a:ext uri="{FF2B5EF4-FFF2-40B4-BE49-F238E27FC236}">
+                  <a16:creationId xmlns:a16="http://schemas.microsoft.com/office/drawing/2014/main" id="{968C04D1-C022-4742-12D3-D574D1942208}"/>
+                </a:ext>
+              </a:extLst>
+            </p:cNvPr>
+            <p:cNvSpPr txBox="1"/>
+            <p:nvPr/>
+          </p:nvSpPr>
+          <p:spPr>
+            <a:xfrm>
+              <a:off x="7218790" y="2650747"/>
+              <a:ext cx="1363308" cy="369332"/>
+            </a:xfrm>
+            <a:prstGeom prst="rect">
+              <a:avLst/>
+            </a:prstGeom>
+            <a:noFill/>
+          </p:spPr>
+          <p:txBody>
+            <a:bodyPr wrap="square" rtlCol="0">
+              <a:spAutoFit/>
+            </a:bodyPr>
+            <a:lstStyle/>
+            <a:p>
+              <a:r>
+                <a:rPr lang="zh-CN" altLang="en-US" b="1"/>
+                <a:t>折流板切口</a:t>
+              </a:r>
+            </a:p>
+          </p:txBody>
+        </p:sp>
+        <p:pic>
+          <p:nvPicPr>
+            <p:cNvPr id="26" name="图片 25">
+              <a:extLst>
+                <a:ext uri="{FF2B5EF4-FFF2-40B4-BE49-F238E27FC236}">
+                  <a16:creationId xmlns:a16="http://schemas.microsoft.com/office/drawing/2014/main" id="{CF7EF2A7-49DE-C6FD-883B-ABF7FCDCA43F}"/>
+                </a:ext>
+              </a:extLst>
+            </p:cNvPr>
+            <p:cNvPicPr>
+              <a:picLocks noChangeAspect="1"/>
+            </p:cNvPicPr>
+            <p:nvPr/>
+          </p:nvPicPr>
+          <p:blipFill>
+            <a:blip r:embed="rId7">
+              <a:extLst>
+                <a:ext uri="{28A0092B-C50C-407E-A947-70E740481C1C}">
+                  <a14:useLocalDpi xmlns:a14="http://schemas.microsoft.com/office/drawing/2010/main" val="0"/>
+                </a:ext>
+              </a:extLst>
+            </a:blip>
+            <a:stretch>
+              <a:fillRect/>
+            </a:stretch>
+          </p:blipFill>
+          <p:spPr>
+            <a:xfrm>
+              <a:off x="6709266" y="2744201"/>
+              <a:ext cx="509524" cy="200000"/>
+            </a:xfrm>
+            <a:prstGeom prst="rect">
+              <a:avLst/>
+            </a:prstGeom>
+          </p:spPr>
+        </p:pic>
+      </p:grpSp>
+      <p:grpSp>
+        <p:nvGrpSpPr>
+          <p:cNvPr id="11" name="组合 10">
+            <a:extLst>
+              <a:ext uri="{FF2B5EF4-FFF2-40B4-BE49-F238E27FC236}">
+                <a16:creationId xmlns:a16="http://schemas.microsoft.com/office/drawing/2014/main" id="{AC46DF8D-4E7E-BD4E-3062-2F7073766AC4}"/>
+              </a:ext>
+            </a:extLst>
+          </p:cNvPr>
+          <p:cNvGrpSpPr/>
           <p:nvPr/>
-        </p:nvSpPr>
-        <p:spPr>
+        </p:nvGrpSpPr>
+        <p:grpSpPr>
           <a:xfrm>
-            <a:off x="3146686" y="2643925"/>
-            <a:ext cx="1120514" cy="369332"/>
+            <a:off x="9238144" y="2635732"/>
+            <a:ext cx="1363308" cy="369332"/>
+            <a:chOff x="8551534" y="2635734"/>
+            <a:chExt cx="1363308" cy="369332"/>
           </a:xfrm>
-          <a:prstGeom prst="rect">
-            <a:avLst/>
-          </a:prstGeom>
-          <a:noFill/>
-        </p:spPr>
-        <p:txBody>
-          <a:bodyPr wrap="square" rtlCol="0">
-            <a:spAutoFit/>
-          </a:bodyPr>
-          <a:lstStyle/>
-          <a:p>
-            <a:r>
-              <a:rPr lang="zh-CN" altLang="en-US" b="1"/>
-              <a:t>中间挡管</a:t>
-            </a:r>
-          </a:p>
-        </p:txBody>
-      </p:sp>
-      <p:sp>
-        <p:nvSpPr>
-          <p:cNvPr id="15" name="文本框 14">
-            <a:extLst>
-              <a:ext uri="{FF2B5EF4-FFF2-40B4-BE49-F238E27FC236}">
-                <a16:creationId xmlns:a16="http://schemas.microsoft.com/office/drawing/2014/main" id="{30925E13-FC43-3BC2-C40C-38A960068CC0}"/>
-              </a:ext>
-            </a:extLst>
-          </p:cNvPr>
-          <p:cNvSpPr txBox="1"/>
+        </p:grpSpPr>
+        <p:sp>
+          <p:nvSpPr>
+            <p:cNvPr id="23" name="文本框 22">
+              <a:extLst>
+                <a:ext uri="{FF2B5EF4-FFF2-40B4-BE49-F238E27FC236}">
+                  <a16:creationId xmlns:a16="http://schemas.microsoft.com/office/drawing/2014/main" id="{A8834867-11A8-2A25-29CB-239A37C69AFB}"/>
+                </a:ext>
+              </a:extLst>
+            </p:cNvPr>
+            <p:cNvSpPr txBox="1"/>
+            <p:nvPr/>
+          </p:nvSpPr>
+          <p:spPr>
+            <a:xfrm>
+              <a:off x="8801132" y="2635734"/>
+              <a:ext cx="1113710" cy="369332"/>
+            </a:xfrm>
+            <a:prstGeom prst="rect">
+              <a:avLst/>
+            </a:prstGeom>
+            <a:noFill/>
+          </p:spPr>
+          <p:txBody>
+            <a:bodyPr wrap="square" rtlCol="0">
+              <a:spAutoFit/>
+            </a:bodyPr>
+            <a:lstStyle/>
+            <a:p>
+              <a:r>
+                <a:rPr lang="zh-CN" altLang="en-US" b="1"/>
+                <a:t>环首螺钉</a:t>
+              </a:r>
+            </a:p>
+          </p:txBody>
+        </p:sp>
+        <p:pic>
+          <p:nvPicPr>
+            <p:cNvPr id="28" name="图片 27">
+              <a:extLst>
+                <a:ext uri="{FF2B5EF4-FFF2-40B4-BE49-F238E27FC236}">
+                  <a16:creationId xmlns:a16="http://schemas.microsoft.com/office/drawing/2014/main" id="{D2B8EBFF-8324-63E3-1F96-9FD7C6DA052E}"/>
+                </a:ext>
+              </a:extLst>
+            </p:cNvPr>
+            <p:cNvPicPr>
+              <a:picLocks noChangeAspect="1"/>
+            </p:cNvPicPr>
+            <p:nvPr/>
+          </p:nvPicPr>
+          <p:blipFill>
+            <a:blip r:embed="rId8">
+              <a:extLst>
+                <a:ext uri="{28A0092B-C50C-407E-A947-70E740481C1C}">
+                  <a14:useLocalDpi xmlns:a14="http://schemas.microsoft.com/office/drawing/2010/main" val="0"/>
+                </a:ext>
+              </a:extLst>
+            </a:blip>
+            <a:stretch>
+              <a:fillRect/>
+            </a:stretch>
+          </p:blipFill>
+          <p:spPr>
+            <a:xfrm>
+              <a:off x="8551534" y="2684696"/>
+              <a:ext cx="280162" cy="271407"/>
+            </a:xfrm>
+            <a:prstGeom prst="rect">
+              <a:avLst/>
+            </a:prstGeom>
+          </p:spPr>
+        </p:pic>
+      </p:grpSp>
+      <p:grpSp>
+        <p:nvGrpSpPr>
+          <p:cNvPr id="17" name="组合 16">
+            <a:extLst>
+              <a:ext uri="{FF2B5EF4-FFF2-40B4-BE49-F238E27FC236}">
+                <a16:creationId xmlns:a16="http://schemas.microsoft.com/office/drawing/2014/main" id="{ED549036-EEF4-94A9-AAC2-7B90A9B95581}"/>
+              </a:ext>
+            </a:extLst>
+          </p:cNvPr>
+          <p:cNvGrpSpPr/>
           <p:nvPr/>
-        </p:nvSpPr>
-        <p:spPr>
+        </p:nvGrpSpPr>
+        <p:grpSpPr>
           <a:xfrm>
-            <a:off x="4596318" y="2643925"/>
-            <a:ext cx="1114672" cy="369332"/>
+            <a:off x="10526310" y="2623813"/>
+            <a:ext cx="1633775" cy="369332"/>
+            <a:chOff x="9871584" y="2635734"/>
+            <a:chExt cx="1633775" cy="369332"/>
           </a:xfrm>
-          <a:prstGeom prst="rect">
-            <a:avLst/>
-          </a:prstGeom>
-          <a:noFill/>
-        </p:spPr>
-        <p:txBody>
-          <a:bodyPr wrap="square" rtlCol="0">
-            <a:spAutoFit/>
-          </a:bodyPr>
-          <a:lstStyle/>
-          <a:p>
-            <a:r>
-              <a:rPr lang="zh-CN" altLang="en-US" b="1"/>
-              <a:t>中间挡板</a:t>
-            </a:r>
-          </a:p>
-        </p:txBody>
-      </p:sp>
-      <p:sp>
-        <p:nvSpPr>
-          <p:cNvPr id="16" name="文本框 15">
-            <a:extLst>
-              <a:ext uri="{FF2B5EF4-FFF2-40B4-BE49-F238E27FC236}">
-                <a16:creationId xmlns:a16="http://schemas.microsoft.com/office/drawing/2014/main" id="{968C04D1-C022-4742-12D3-D574D1942208}"/>
-              </a:ext>
-            </a:extLst>
-          </p:cNvPr>
-          <p:cNvSpPr txBox="1"/>
+        </p:grpSpPr>
+        <p:sp>
+          <p:nvSpPr>
+            <p:cNvPr id="13" name="文本框 12">
+              <a:extLst>
+                <a:ext uri="{FF2B5EF4-FFF2-40B4-BE49-F238E27FC236}">
+                  <a16:creationId xmlns:a16="http://schemas.microsoft.com/office/drawing/2014/main" id="{C35945DE-E152-D036-8D19-D1B964B402D2}"/>
+                </a:ext>
+              </a:extLst>
+            </p:cNvPr>
+            <p:cNvSpPr txBox="1"/>
+            <p:nvPr/>
+          </p:nvSpPr>
+          <p:spPr>
+            <a:xfrm>
+              <a:off x="10465229" y="2635734"/>
+              <a:ext cx="1040130" cy="369332"/>
+            </a:xfrm>
+            <a:prstGeom prst="rect">
+              <a:avLst/>
+            </a:prstGeom>
+            <a:noFill/>
+          </p:spPr>
+          <p:txBody>
+            <a:bodyPr wrap="square" rtlCol="0">
+              <a:spAutoFit/>
+            </a:bodyPr>
+            <a:lstStyle/>
+            <a:p>
+              <a:r>
+                <a:rPr lang="zh-CN" altLang="en-US" b="1"/>
+                <a:t>防冲板</a:t>
+              </a:r>
+            </a:p>
+          </p:txBody>
+        </p:sp>
+        <p:pic>
+          <p:nvPicPr>
+            <p:cNvPr id="30" name="图片 29">
+              <a:extLst>
+                <a:ext uri="{FF2B5EF4-FFF2-40B4-BE49-F238E27FC236}">
+                  <a16:creationId xmlns:a16="http://schemas.microsoft.com/office/drawing/2014/main" id="{CEE699D9-2B23-D462-F8F3-BC78FB4222A6}"/>
+                </a:ext>
+              </a:extLst>
+            </p:cNvPr>
+            <p:cNvPicPr>
+              <a:picLocks noChangeAspect="1"/>
+            </p:cNvPicPr>
+            <p:nvPr/>
+          </p:nvPicPr>
+          <p:blipFill>
+            <a:blip r:embed="rId9">
+              <a:extLst>
+                <a:ext uri="{28A0092B-C50C-407E-A947-70E740481C1C}">
+                  <a14:useLocalDpi xmlns:a14="http://schemas.microsoft.com/office/drawing/2010/main" val="0"/>
+                </a:ext>
+              </a:extLst>
+            </a:blip>
+            <a:stretch>
+              <a:fillRect/>
+            </a:stretch>
+          </p:blipFill>
+          <p:spPr>
+            <a:xfrm>
+              <a:off x="9871584" y="2682053"/>
+              <a:ext cx="585712" cy="257142"/>
+            </a:xfrm>
+            <a:prstGeom prst="rect">
+              <a:avLst/>
+            </a:prstGeom>
+          </p:spPr>
+        </p:pic>
+      </p:grpSp>
+      <p:grpSp>
+        <p:nvGrpSpPr>
+          <p:cNvPr id="25" name="组合 24">
+            <a:extLst>
+              <a:ext uri="{FF2B5EF4-FFF2-40B4-BE49-F238E27FC236}">
+                <a16:creationId xmlns:a16="http://schemas.microsoft.com/office/drawing/2014/main" id="{C3C6DC26-7292-1A88-C565-ECBBF1E192A5}"/>
+              </a:ext>
+            </a:extLst>
+          </p:cNvPr>
+          <p:cNvGrpSpPr/>
           <p:nvPr/>
-        </p:nvSpPr>
-        <p:spPr>
+        </p:nvGrpSpPr>
+        <p:grpSpPr>
           <a:xfrm>
-            <a:off x="7218790" y="2650747"/>
-            <a:ext cx="1363308" cy="369332"/>
+            <a:off x="8191643" y="2633362"/>
+            <a:ext cx="1038568" cy="369332"/>
+            <a:chOff x="6063272" y="3944697"/>
+            <a:chExt cx="1038568" cy="369332"/>
           </a:xfrm>
-          <a:prstGeom prst="rect">
-            <a:avLst/>
-          </a:prstGeom>
-          <a:noFill/>
-        </p:spPr>
-        <p:txBody>
-          <a:bodyPr wrap="square" rtlCol="0">
-            <a:spAutoFit/>
-          </a:bodyPr>
-          <a:lstStyle/>
-          <a:p>
-            <a:r>
-              <a:rPr lang="zh-CN" altLang="en-US" b="1"/>
-              <a:t>折流板切口</a:t>
-            </a:r>
-          </a:p>
-        </p:txBody>
-      </p:sp>
-      <p:pic>
-        <p:nvPicPr>
-          <p:cNvPr id="20" name="图片 19">
-            <a:extLst>
-              <a:ext uri="{FF2B5EF4-FFF2-40B4-BE49-F238E27FC236}">
-                <a16:creationId xmlns:a16="http://schemas.microsoft.com/office/drawing/2014/main" id="{08579511-3DEF-10D5-C064-19F61D3FD78D}"/>
-              </a:ext>
-            </a:extLst>
-          </p:cNvPr>
-          <p:cNvPicPr>
-            <a:picLocks noChangeAspect="1"/>
-          </p:cNvPicPr>
-          <p:nvPr/>
-        </p:nvPicPr>
-        <p:blipFill>
-          <a:blip r:embed="rId5">
-            <a:extLst>
-              <a:ext uri="{28A0092B-C50C-407E-A947-70E740481C1C}">
-                <a14:useLocalDpi xmlns:a14="http://schemas.microsoft.com/office/drawing/2010/main" val="0"/>
-              </a:ext>
-            </a:extLst>
-          </a:blip>
-          <a:stretch>
-            <a:fillRect/>
-          </a:stretch>
-        </p:blipFill>
-        <p:spPr>
-          <a:xfrm>
-            <a:off x="4301099" y="2625903"/>
-            <a:ext cx="295219" cy="419021"/>
-          </a:xfrm>
-          <a:prstGeom prst="rect">
-            <a:avLst/>
-          </a:prstGeom>
-        </p:spPr>
-      </p:pic>
-      <p:pic>
-        <p:nvPicPr>
-          <p:cNvPr id="22" name="图片 21">
-            <a:extLst>
-              <a:ext uri="{FF2B5EF4-FFF2-40B4-BE49-F238E27FC236}">
-                <a16:creationId xmlns:a16="http://schemas.microsoft.com/office/drawing/2014/main" id="{41E67AF1-3683-76F5-6290-0BF12D4B2437}"/>
-              </a:ext>
-            </a:extLst>
-          </p:cNvPr>
-          <p:cNvPicPr>
-            <a:picLocks noChangeAspect="1"/>
-          </p:cNvPicPr>
-          <p:nvPr/>
-        </p:nvPicPr>
-        <p:blipFill>
-          <a:blip r:embed="rId6">
-            <a:extLst>
-              <a:ext uri="{28A0092B-C50C-407E-A947-70E740481C1C}">
-                <a14:useLocalDpi xmlns:a14="http://schemas.microsoft.com/office/drawing/2010/main" val="0"/>
-              </a:ext>
-            </a:extLst>
-          </a:blip>
-          <a:stretch>
-            <a:fillRect/>
-          </a:stretch>
-        </p:blipFill>
-        <p:spPr>
-          <a:xfrm>
-            <a:off x="5733882" y="2696599"/>
-            <a:ext cx="362118" cy="247602"/>
-          </a:xfrm>
-          <a:prstGeom prst="rect">
-            <a:avLst/>
-          </a:prstGeom>
-        </p:spPr>
-      </p:pic>
-      <p:sp>
-        <p:nvSpPr>
-          <p:cNvPr id="23" name="文本框 22">
-            <a:extLst>
-              <a:ext uri="{FF2B5EF4-FFF2-40B4-BE49-F238E27FC236}">
-                <a16:creationId xmlns:a16="http://schemas.microsoft.com/office/drawing/2014/main" id="{A8834867-11A8-2A25-29CB-239A37C69AFB}"/>
-              </a:ext>
-            </a:extLst>
-          </p:cNvPr>
-          <p:cNvSpPr txBox="1"/>
-          <p:nvPr/>
-        </p:nvSpPr>
-        <p:spPr>
-          <a:xfrm>
-            <a:off x="8801132" y="2635734"/>
-            <a:ext cx="1113710" cy="369332"/>
-          </a:xfrm>
-          <a:prstGeom prst="rect">
-            <a:avLst/>
-          </a:prstGeom>
-          <a:noFill/>
-        </p:spPr>
-        <p:txBody>
-          <a:bodyPr wrap="square" rtlCol="0">
-            <a:spAutoFit/>
-          </a:bodyPr>
-          <a:lstStyle/>
-          <a:p>
-            <a:r>
-              <a:rPr lang="zh-CN" altLang="en-US" b="1"/>
-              <a:t>环首螺钉</a:t>
-            </a:r>
-          </a:p>
-        </p:txBody>
-      </p:sp>
-      <p:sp>
-        <p:nvSpPr>
-          <p:cNvPr id="24" name="文本框 23">
-            <a:extLst>
-              <a:ext uri="{FF2B5EF4-FFF2-40B4-BE49-F238E27FC236}">
-                <a16:creationId xmlns:a16="http://schemas.microsoft.com/office/drawing/2014/main" id="{75398242-B606-4DD1-E18D-96582746A1CE}"/>
-              </a:ext>
-            </a:extLst>
-          </p:cNvPr>
-          <p:cNvSpPr txBox="1"/>
-          <p:nvPr/>
-        </p:nvSpPr>
-        <p:spPr>
-          <a:xfrm>
-            <a:off x="6069143" y="2635734"/>
-            <a:ext cx="1040130" cy="369332"/>
-          </a:xfrm>
-          <a:prstGeom prst="rect">
-            <a:avLst/>
-          </a:prstGeom>
-          <a:noFill/>
-        </p:spPr>
-        <p:txBody>
-          <a:bodyPr wrap="square" rtlCol="0">
-            <a:spAutoFit/>
-          </a:bodyPr>
-          <a:lstStyle/>
-          <a:p>
-            <a:r>
-              <a:rPr lang="zh-CN" altLang="en-US" b="1"/>
-              <a:t>滑道</a:t>
-            </a:r>
-          </a:p>
-        </p:txBody>
-      </p:sp>
-      <p:pic>
-        <p:nvPicPr>
-          <p:cNvPr id="26" name="图片 25">
-            <a:extLst>
-              <a:ext uri="{FF2B5EF4-FFF2-40B4-BE49-F238E27FC236}">
-                <a16:creationId xmlns:a16="http://schemas.microsoft.com/office/drawing/2014/main" id="{CF7EF2A7-49DE-C6FD-883B-ABF7FCDCA43F}"/>
-              </a:ext>
-            </a:extLst>
-          </p:cNvPr>
-          <p:cNvPicPr>
-            <a:picLocks noChangeAspect="1"/>
-          </p:cNvPicPr>
-          <p:nvPr/>
-        </p:nvPicPr>
-        <p:blipFill>
-          <a:blip r:embed="rId7">
-            <a:extLst>
-              <a:ext uri="{28A0092B-C50C-407E-A947-70E740481C1C}">
-                <a14:useLocalDpi xmlns:a14="http://schemas.microsoft.com/office/drawing/2010/main" val="0"/>
-              </a:ext>
-            </a:extLst>
-          </a:blip>
-          <a:stretch>
-            <a:fillRect/>
-          </a:stretch>
-        </p:blipFill>
-        <p:spPr>
-          <a:xfrm>
-            <a:off x="6709266" y="2744201"/>
-            <a:ext cx="509524" cy="200000"/>
-          </a:xfrm>
-          <a:prstGeom prst="rect">
-            <a:avLst/>
-          </a:prstGeom>
-        </p:spPr>
-      </p:pic>
-      <p:pic>
-        <p:nvPicPr>
-          <p:cNvPr id="28" name="图片 27">
-            <a:extLst>
-              <a:ext uri="{FF2B5EF4-FFF2-40B4-BE49-F238E27FC236}">
-                <a16:creationId xmlns:a16="http://schemas.microsoft.com/office/drawing/2014/main" id="{D2B8EBFF-8324-63E3-1F96-9FD7C6DA052E}"/>
-              </a:ext>
-            </a:extLst>
-          </p:cNvPr>
-          <p:cNvPicPr>
-            <a:picLocks noChangeAspect="1"/>
-          </p:cNvPicPr>
-          <p:nvPr/>
-        </p:nvPicPr>
-        <p:blipFill>
-          <a:blip r:embed="rId8">
-            <a:extLst>
-              <a:ext uri="{28A0092B-C50C-407E-A947-70E740481C1C}">
-                <a14:useLocalDpi xmlns:a14="http://schemas.microsoft.com/office/drawing/2010/main" val="0"/>
-              </a:ext>
-            </a:extLst>
-          </a:blip>
-          <a:stretch>
-            <a:fillRect/>
-          </a:stretch>
-        </p:blipFill>
-        <p:spPr>
-          <a:xfrm>
-            <a:off x="8551534" y="2684696"/>
-            <a:ext cx="280162" cy="271407"/>
-          </a:xfrm>
-          <a:prstGeom prst="rect">
-            <a:avLst/>
-          </a:prstGeom>
-        </p:spPr>
-      </p:pic>
-      <p:pic>
-        <p:nvPicPr>
-          <p:cNvPr id="30" name="图片 29">
-            <a:extLst>
-              <a:ext uri="{FF2B5EF4-FFF2-40B4-BE49-F238E27FC236}">
-                <a16:creationId xmlns:a16="http://schemas.microsoft.com/office/drawing/2014/main" id="{CEE699D9-2B23-D462-F8F3-BC78FB4222A6}"/>
-              </a:ext>
-            </a:extLst>
-          </p:cNvPr>
-          <p:cNvPicPr>
-            <a:picLocks noChangeAspect="1"/>
-          </p:cNvPicPr>
-          <p:nvPr/>
-        </p:nvPicPr>
-        <p:blipFill>
-          <a:blip r:embed="rId9">
-            <a:extLst>
-              <a:ext uri="{28A0092B-C50C-407E-A947-70E740481C1C}">
-                <a14:useLocalDpi xmlns:a14="http://schemas.microsoft.com/office/drawing/2010/main" val="0"/>
-              </a:ext>
-            </a:extLst>
-          </a:blip>
-          <a:stretch>
-            <a:fillRect/>
-          </a:stretch>
-        </p:blipFill>
-        <p:spPr>
-          <a:xfrm>
-            <a:off x="9871584" y="2682053"/>
-            <a:ext cx="585712" cy="257142"/>
-          </a:xfrm>
-          <a:prstGeom prst="rect">
-            <a:avLst/>
-          </a:prstGeom>
-        </p:spPr>
-      </p:pic>
+        </p:grpSpPr>
+        <p:sp>
+          <p:nvSpPr>
+            <p:cNvPr id="19" name="矩形 18">
+              <a:extLst>
+                <a:ext uri="{FF2B5EF4-FFF2-40B4-BE49-F238E27FC236}">
+                  <a16:creationId xmlns:a16="http://schemas.microsoft.com/office/drawing/2014/main" id="{DC17A37E-7B70-9FD4-0715-4AD1DE4AB4E6}"/>
+                </a:ext>
+              </a:extLst>
+            </p:cNvPr>
+            <p:cNvSpPr/>
+            <p:nvPr/>
+          </p:nvSpPr>
+          <p:spPr>
+            <a:xfrm>
+              <a:off x="6063272" y="4053163"/>
+              <a:ext cx="351064" cy="152400"/>
+            </a:xfrm>
+            <a:prstGeom prst="rect">
+              <a:avLst/>
+            </a:prstGeom>
+            <a:solidFill>
+              <a:srgbClr val="00B050"/>
+            </a:solidFill>
+            <a:ln>
+              <a:noFill/>
+            </a:ln>
+          </p:spPr>
+          <p:style>
+            <a:lnRef idx="2">
+              <a:schemeClr val="accent6">
+                <a:shade val="15000"/>
+              </a:schemeClr>
+            </a:lnRef>
+            <a:fillRef idx="1">
+              <a:schemeClr val="accent6"/>
+            </a:fillRef>
+            <a:effectRef idx="0">
+              <a:schemeClr val="accent6"/>
+            </a:effectRef>
+            <a:fontRef idx="minor">
+              <a:schemeClr val="lt1"/>
+            </a:fontRef>
+          </p:style>
+          <p:txBody>
+            <a:bodyPr rtlCol="0" anchor="ctr"/>
+            <a:lstStyle/>
+            <a:p>
+              <a:pPr algn="ctr"/>
+              <a:endParaRPr lang="zh-CN" altLang="en-US"/>
+            </a:p>
+          </p:txBody>
+        </p:sp>
+        <p:sp>
+          <p:nvSpPr>
+            <p:cNvPr id="21" name="文本框 20">
+              <a:extLst>
+                <a:ext uri="{FF2B5EF4-FFF2-40B4-BE49-F238E27FC236}">
+                  <a16:creationId xmlns:a16="http://schemas.microsoft.com/office/drawing/2014/main" id="{1DB66DB1-17A4-FF57-CA46-C5F6DA849209}"/>
+                </a:ext>
+              </a:extLst>
+            </p:cNvPr>
+            <p:cNvSpPr txBox="1"/>
+            <p:nvPr/>
+          </p:nvSpPr>
+          <p:spPr>
+            <a:xfrm>
+              <a:off x="6414336" y="3944697"/>
+              <a:ext cx="687504" cy="369332"/>
+            </a:xfrm>
+            <a:prstGeom prst="rect">
+              <a:avLst/>
+            </a:prstGeom>
+            <a:noFill/>
+          </p:spPr>
+          <p:txBody>
+            <a:bodyPr wrap="square" rtlCol="0">
+              <a:spAutoFit/>
+            </a:bodyPr>
+            <a:lstStyle/>
+            <a:p>
+              <a:r>
+                <a:rPr lang="zh-CN" altLang="en-US" b="1"/>
+                <a:t>滑道</a:t>
+              </a:r>
+            </a:p>
+          </p:txBody>
+        </p:sp>
+      </p:grpSp>
     </p:spTree>
     <p:extLst>
       <p:ext uri="{BB962C8B-B14F-4D97-AF65-F5344CB8AC3E}">
